--- a/docs/ppt/答辩PPT.pptx
+++ b/docs/ppt/答辩PPT.pptx
@@ -2268,7 +2268,7 @@
                 <a:ea typeface="Consolas" pitchFamily="34" charset="-122"/>
                 <a:cs typeface="Consolas" pitchFamily="34" charset="-120"/>
               </a:rPr>
-              <a:t>v1.0.0</a:t>
+              <a:t>v1.0.1</a:t>
             </a:r>
             <a:endParaRPr lang="en-US" sz="1100" dirty="0"/>
           </a:p>
@@ -10713,7 +10713,7 @@
                           <a:ea typeface="微软雅黑" pitchFamily="34" charset="-122"/>
                           <a:cs typeface="微软雅黑" pitchFamily="34" charset="-120"/>
                         </a:rPr>
-                        <a:t>DataBackup-1.0.0.AppImage</a:t>
+                        <a:t>DataBackup-1.0.1.AppImage</a:t>
                       </a:r>
                       <a:endParaRPr lang="en-US" sz="1050" dirty="0">
                         <a:latin typeface="微软雅黑" charset="0"/>
@@ -10910,7 +10910,7 @@
                           <a:ea typeface="微软雅黑" pitchFamily="34" charset="-122"/>
                           <a:cs typeface="微软雅黑" pitchFamily="34" charset="-120"/>
                         </a:rPr>
-                        <a:t>databackup-client_1.0.0_amd64.deb</a:t>
+                        <a:t>databackup-client_1.0.1_amd64.deb</a:t>
                       </a:r>
                       <a:endParaRPr lang="en-US" sz="1050" dirty="0">
                         <a:latin typeface="微软雅黑" charset="0"/>
@@ -11107,7 +11107,7 @@
                           <a:ea typeface="微软雅黑" pitchFamily="34" charset="-122"/>
                           <a:cs typeface="微软雅黑" pitchFamily="34" charset="-120"/>
                         </a:rPr>
-                        <a:t>databackup-1.0.0-linux-x86_64.tar.gz</a:t>
+                        <a:t>databackup-1.0.1-linux-x86_64.tar.gz</a:t>
                       </a:r>
                       <a:endParaRPr lang="en-US" sz="1050" dirty="0">
                         <a:latin typeface="微软雅黑" charset="0"/>
@@ -11304,7 +11304,7 @@
                           <a:ea typeface="微软雅黑" pitchFamily="34" charset="-122"/>
                           <a:cs typeface="微软雅黑" pitchFamily="34" charset="-120"/>
                         </a:rPr>
-                        <a:t>databackup-1.0.0-source.tar.gz</a:t>
+                        <a:t>databackup-1.0.1-source.tar.gz</a:t>
                       </a:r>
                       <a:endParaRPr lang="en-US" sz="1050" dirty="0">
                         <a:latin typeface="微软雅黑" charset="0"/>
@@ -11717,7 +11717,7 @@
                 <a:ea typeface="微软雅黑" pitchFamily="34" charset="-122"/>
                 <a:cs typeface="微软雅黑" pitchFamily="34" charset="-120"/>
               </a:rPr>
-              <a:t>v1.0.0 Release 资产，同时提供 sha256sums.txt；打 tag 由 CI 自动构建并发布。</a:t>
+              <a:t>v1.0.1 Release 资产，同时提供 sha256sums.txt；打 tag 由 CI 自动构建并发布。</a:t>
             </a:r>
             <a:endParaRPr lang="en-US" sz="900" dirty="0"/>
           </a:p>
@@ -11798,7 +11798,7 @@
                 <a:ea typeface="Consolas" pitchFamily="34" charset="-122"/>
                 <a:cs typeface="Consolas" pitchFamily="34" charset="-120"/>
               </a:rPr>
-              <a:t>sudo dpkg -i databackup-client_1.0.0_amd64.deb</a:t>
+              <a:t>sudo dpkg -i databackup-client_1.0.1_amd64.deb</a:t>
             </a:r>
             <a:endParaRPr lang="en-US" sz="1000" dirty="0"/>
           </a:p>

--- a/docs/ppt/答辩PPT.pptx
+++ b/docs/ppt/答辩PPT.pptx
@@ -10489,7 +10489,7 @@
                 <a:gridCol w="1371600"/>
                 <a:gridCol w="4846320"/>
               </a:tblGrid>
-              <a:tr h="402336">
+              <a:tr h="365760">
                 <a:tc>
                   <a:txBody>
                     <a:bodyPr/>
@@ -10695,7 +10695,7 @@
                   </a:tcPr>
                 </a:tc>
               </a:tr>
-              <a:tr h="402336">
+              <a:tr h="365760">
                 <a:tc>
                   <a:txBody>
                     <a:bodyPr/>
@@ -10892,7 +10892,7 @@
                   </a:tcPr>
                 </a:tc>
               </a:tr>
-              <a:tr h="402336">
+              <a:tr h="365760">
                 <a:tc>
                   <a:txBody>
                     <a:bodyPr/>
@@ -11089,7 +11089,7 @@
                   </a:tcPr>
                 </a:tc>
               </a:tr>
-              <a:tr h="402336">
+              <a:tr h="365760">
                 <a:tc>
                   <a:txBody>
                     <a:bodyPr/>
@@ -11286,7 +11286,7 @@
                   </a:tcPr>
                 </a:tc>
               </a:tr>
-              <a:tr h="402336">
+              <a:tr h="365760">
                 <a:tc>
                   <a:txBody>
                     <a:bodyPr/>
@@ -11369,7 +11369,7 @@
                           <a:ea typeface="微软雅黑" pitchFamily="34" charset="-122"/>
                           <a:cs typeface="微软雅黑" pitchFamily="34" charset="-120"/>
                         </a:rPr>
-                        <a:t>6.0 MB</a:t>
+                        <a:t>9.4 MB</a:t>
                       </a:r>
                       <a:endParaRPr lang="en-US" sz="1050" dirty="0">
                         <a:latin typeface="微软雅黑" charset="0"/>
@@ -11483,7 +11483,204 @@
                   </a:tcPr>
                 </a:tc>
               </a:tr>
-              <a:tr h="402336">
+              <a:tr h="365760">
+                <a:tc>
+                  <a:txBody>
+                    <a:bodyPr/>
+                    <a:lstStyle/>
+                    <a:p>
+                      <a:pPr indent="0" marL="0">
+                        <a:buNone/>
+                      </a:pPr>
+                      <a:r>
+                        <a:rPr lang="en-US" sz="1050" dirty="0">
+                          <a:solidFill>
+                            <a:srgbClr val="1A1D1F"/>
+                          </a:solidFill>
+                          <a:latin typeface="微软雅黑" pitchFamily="34" charset="0"/>
+                          <a:ea typeface="微软雅黑" pitchFamily="34" charset="-122"/>
+                          <a:cs typeface="微软雅黑" pitchFamily="34" charset="-120"/>
+                        </a:rPr>
+                        <a:t>DataBackup-1.0.1-portable.exe</a:t>
+                      </a:r>
+                      <a:endParaRPr lang="en-US" sz="1050" dirty="0">
+                        <a:latin typeface="微软雅黑" charset="0"/>
+                        <a:ea typeface="微软雅黑" charset="0"/>
+                        <a:cs typeface="微软雅黑" charset="0"/>
+                      </a:endParaRPr>
+                    </a:p>
+                  </a:txBody>
+                  <a:tcPr marL="54864" marR="54864" marT="54864" marB="54864" anchor="ctr">
+                    <a:lnL w="6350" cap="flat" cmpd="sng" algn="ctr">
+                      <a:solidFill>
+                        <a:srgbClr val="E3E6E8"/>
+                      </a:solidFill>
+                      <a:prstDash val="solid"/>
+                      <a:round/>
+                      <a:headEnd type="none" w="med" len="med"/>
+                      <a:tailEnd type="none" w="med" len="med"/>
+                    </a:lnL>
+                    <a:lnR w="6350" cap="flat" cmpd="sng" algn="ctr">
+                      <a:solidFill>
+                        <a:srgbClr val="E3E6E8"/>
+                      </a:solidFill>
+                      <a:prstDash val="solid"/>
+                      <a:round/>
+                      <a:headEnd type="none" w="med" len="med"/>
+                      <a:tailEnd type="none" w="med" len="med"/>
+                    </a:lnR>
+                    <a:lnT w="6350" cap="flat" cmpd="sng" algn="ctr">
+                      <a:solidFill>
+                        <a:srgbClr val="E3E6E8"/>
+                      </a:solidFill>
+                      <a:prstDash val="solid"/>
+                      <a:round/>
+                      <a:headEnd type="none" w="med" len="med"/>
+                      <a:tailEnd type="none" w="med" len="med"/>
+                    </a:lnT>
+                    <a:lnB w="6350" cap="flat" cmpd="sng" algn="ctr">
+                      <a:solidFill>
+                        <a:srgbClr val="E3E6E8"/>
+                      </a:solidFill>
+                      <a:prstDash val="solid"/>
+                      <a:round/>
+                      <a:headEnd type="none" w="med" len="med"/>
+                      <a:tailEnd type="none" w="med" len="med"/>
+                    </a:lnB>
+                  </a:tcPr>
+                </a:tc>
+                <a:tc>
+                  <a:txBody>
+                    <a:bodyPr/>
+                    <a:lstStyle/>
+                    <a:p>
+                      <a:pPr indent="0" marL="0">
+                        <a:buNone/>
+                      </a:pPr>
+                      <a:r>
+                        <a:rPr lang="en-US" sz="1050" dirty="0">
+                          <a:solidFill>
+                            <a:srgbClr val="33383D"/>
+                          </a:solidFill>
+                          <a:latin typeface="微软雅黑" pitchFamily="34" charset="0"/>
+                          <a:ea typeface="微软雅黑" pitchFamily="34" charset="-122"/>
+                          <a:cs typeface="微软雅黑" pitchFamily="34" charset="-120"/>
+                        </a:rPr>
+                        <a:t>116 MB</a:t>
+                      </a:r>
+                      <a:endParaRPr lang="en-US" sz="1050" dirty="0">
+                        <a:latin typeface="微软雅黑" charset="0"/>
+                        <a:ea typeface="微软雅黑" charset="0"/>
+                        <a:cs typeface="微软雅黑" charset="0"/>
+                      </a:endParaRPr>
+                    </a:p>
+                  </a:txBody>
+                  <a:tcPr marL="54864" marR="54864" marT="54864" marB="54864" anchor="ctr">
+                    <a:lnL w="6350" cap="flat" cmpd="sng" algn="ctr">
+                      <a:solidFill>
+                        <a:srgbClr val="E3E6E8"/>
+                      </a:solidFill>
+                      <a:prstDash val="solid"/>
+                      <a:round/>
+                      <a:headEnd type="none" w="med" len="med"/>
+                      <a:tailEnd type="none" w="med" len="med"/>
+                    </a:lnL>
+                    <a:lnR w="6350" cap="flat" cmpd="sng" algn="ctr">
+                      <a:solidFill>
+                        <a:srgbClr val="E3E6E8"/>
+                      </a:solidFill>
+                      <a:prstDash val="solid"/>
+                      <a:round/>
+                      <a:headEnd type="none" w="med" len="med"/>
+                      <a:tailEnd type="none" w="med" len="med"/>
+                    </a:lnR>
+                    <a:lnT w="6350" cap="flat" cmpd="sng" algn="ctr">
+                      <a:solidFill>
+                        <a:srgbClr val="E3E6E8"/>
+                      </a:solidFill>
+                      <a:prstDash val="solid"/>
+                      <a:round/>
+                      <a:headEnd type="none" w="med" len="med"/>
+                      <a:tailEnd type="none" w="med" len="med"/>
+                    </a:lnT>
+                    <a:lnB w="6350" cap="flat" cmpd="sng" algn="ctr">
+                      <a:solidFill>
+                        <a:srgbClr val="E3E6E8"/>
+                      </a:solidFill>
+                      <a:prstDash val="solid"/>
+                      <a:round/>
+                      <a:headEnd type="none" w="med" len="med"/>
+                      <a:tailEnd type="none" w="med" len="med"/>
+                    </a:lnB>
+                  </a:tcPr>
+                </a:tc>
+                <a:tc>
+                  <a:txBody>
+                    <a:bodyPr/>
+                    <a:lstStyle/>
+                    <a:p>
+                      <a:pPr indent="0" marL="0">
+                        <a:buNone/>
+                      </a:pPr>
+                      <a:r>
+                        <a:rPr lang="en-US" sz="1050" dirty="0">
+                          <a:solidFill>
+                            <a:srgbClr val="33383D"/>
+                          </a:solidFill>
+                          <a:latin typeface="微软雅黑" pitchFamily="34" charset="0"/>
+                          <a:ea typeface="微软雅黑" pitchFamily="34" charset="-122"/>
+                          <a:cs typeface="微软雅黑" pitchFamily="34" charset="-120"/>
+                        </a:rPr>
+                        <a:t>Windows 便携包（可选加分项）</a:t>
+                      </a:r>
+                      <a:endParaRPr lang="en-US" sz="1050" dirty="0">
+                        <a:latin typeface="微软雅黑" charset="0"/>
+                        <a:ea typeface="微软雅黑" charset="0"/>
+                        <a:cs typeface="微软雅黑" charset="0"/>
+                      </a:endParaRPr>
+                    </a:p>
+                  </a:txBody>
+                  <a:tcPr marL="54864" marR="54864" marT="54864" marB="54864" anchor="ctr">
+                    <a:lnL w="6350" cap="flat" cmpd="sng" algn="ctr">
+                      <a:solidFill>
+                        <a:srgbClr val="E3E6E8"/>
+                      </a:solidFill>
+                      <a:prstDash val="solid"/>
+                      <a:round/>
+                      <a:headEnd type="none" w="med" len="med"/>
+                      <a:tailEnd type="none" w="med" len="med"/>
+                    </a:lnL>
+                    <a:lnR w="6350" cap="flat" cmpd="sng" algn="ctr">
+                      <a:solidFill>
+                        <a:srgbClr val="E3E6E8"/>
+                      </a:solidFill>
+                      <a:prstDash val="solid"/>
+                      <a:round/>
+                      <a:headEnd type="none" w="med" len="med"/>
+                      <a:tailEnd type="none" w="med" len="med"/>
+                    </a:lnR>
+                    <a:lnT w="6350" cap="flat" cmpd="sng" algn="ctr">
+                      <a:solidFill>
+                        <a:srgbClr val="E3E6E8"/>
+                      </a:solidFill>
+                      <a:prstDash val="solid"/>
+                      <a:round/>
+                      <a:headEnd type="none" w="med" len="med"/>
+                      <a:tailEnd type="none" w="med" len="med"/>
+                    </a:lnT>
+                    <a:lnB w="6350" cap="flat" cmpd="sng" algn="ctr">
+                      <a:solidFill>
+                        <a:srgbClr val="E3E6E8"/>
+                      </a:solidFill>
+                      <a:prstDash val="solid"/>
+                      <a:round/>
+                      <a:headEnd type="none" w="med" len="med"/>
+                      <a:tailEnd type="none" w="med" len="med"/>
+                    </a:lnB>
+                  </a:tcPr>
+                </a:tc>
+              </a:tr>
+              <a:tr h="365760">
                 <a:tc>
                   <a:txBody>
                     <a:bodyPr/>
@@ -11566,7 +11763,7 @@
                           <a:ea typeface="微软雅黑" pitchFamily="34" charset="-122"/>
                           <a:cs typeface="微软雅黑" pitchFamily="34" charset="-120"/>
                         </a:rPr>
-                        <a:t>3.8 MB</a:t>
+                        <a:t>6.1 MB</a:t>
                       </a:r>
                       <a:endParaRPr lang="en-US" sz="1050" dirty="0">
                         <a:latin typeface="微软雅黑" charset="0"/>
@@ -11692,7 +11889,7 @@
         </p:nvSpPr>
         <p:spPr>
           <a:xfrm>
-            <a:off x="685800" y="3858768"/>
+            <a:off x="685800" y="3931920"/>
             <a:ext cx="10820095" cy="237744"/>
           </a:xfrm>
           <a:prstGeom prst="rect">
@@ -11717,7 +11914,7 @@
                 <a:ea typeface="微软雅黑" pitchFamily="34" charset="-122"/>
                 <a:cs typeface="微软雅黑" pitchFamily="34" charset="-120"/>
               </a:rPr>
-              <a:t>v1.0.1 Release 资产，同时提供 sha256sums.txt；打 tag 由 CI 自动构建并发布。</a:t>
+              <a:t>v1.0.1 Release 资产，同时提供 sha256sums.txt；Windows 便携包为宿主机构建后追加。</a:t>
             </a:r>
             <a:endParaRPr lang="en-US" sz="900" dirty="0"/>
           </a:p>
@@ -11731,7 +11928,7 @@
         </p:nvSpPr>
         <p:spPr>
           <a:xfrm>
-            <a:off x="685800" y="4160520"/>
+            <a:off x="685800" y="4251960"/>
             <a:ext cx="3657600" cy="256032"/>
           </a:xfrm>
           <a:prstGeom prst="rect">
@@ -11770,7 +11967,7 @@
         </p:nvSpPr>
         <p:spPr>
           <a:xfrm>
-            <a:off x="685800" y="4480560"/>
+            <a:off x="685800" y="4553712"/>
             <a:ext cx="6949440" cy="822960"/>
           </a:xfrm>
           <a:prstGeom prst="rect">
@@ -11852,7 +12049,7 @@
         </p:nvSpPr>
         <p:spPr>
           <a:xfrm>
-            <a:off x="7818120" y="4160520"/>
+            <a:off x="7818120" y="4251960"/>
             <a:ext cx="3685032" cy="914400"/>
           </a:xfrm>
           <a:prstGeom prst="rect">
@@ -11872,7 +12069,7 @@
         </p:nvSpPr>
         <p:spPr>
           <a:xfrm>
-            <a:off x="8001000" y="4297680"/>
+            <a:off x="8001000" y="4389120"/>
             <a:ext cx="3337560" cy="685800"/>
           </a:xfrm>
           <a:prstGeom prst="rect">
@@ -11914,7 +12111,7 @@
         </p:nvSpPr>
         <p:spPr>
           <a:xfrm>
-            <a:off x="685800" y="5532120"/>
+            <a:off x="685800" y="5623560"/>
             <a:ext cx="10820095" cy="365760"/>
           </a:xfrm>
           <a:prstGeom prst="rect">
